--- a/Holy Forever-CH.pptx
+++ b/Holy Forever-CH.pptx
@@ -270,7 +270,7 @@
           <a:p>
             <a:fld id="{E759A0DE-F190-5444-87AC-4719D5F20D15}" type="datetimeFigureOut">
               <a:rPr lang="en-US" smtClean="0"/>
-              <a:t>6/10/26</a:t>
+              <a:t>6/13/26</a:t>
             </a:fld>
             <a:endParaRPr lang="en-US"/>
           </a:p>
@@ -468,7 +468,7 @@
           <a:p>
             <a:fld id="{E759A0DE-F190-5444-87AC-4719D5F20D15}" type="datetimeFigureOut">
               <a:rPr lang="en-US" smtClean="0"/>
-              <a:t>6/10/26</a:t>
+              <a:t>6/13/26</a:t>
             </a:fld>
             <a:endParaRPr lang="en-US"/>
           </a:p>
@@ -676,7 +676,7 @@
           <a:p>
             <a:fld id="{E759A0DE-F190-5444-87AC-4719D5F20D15}" type="datetimeFigureOut">
               <a:rPr lang="en-US" smtClean="0"/>
-              <a:t>6/10/26</a:t>
+              <a:t>6/13/26</a:t>
             </a:fld>
             <a:endParaRPr lang="en-US"/>
           </a:p>
@@ -874,7 +874,7 @@
           <a:p>
             <a:fld id="{E759A0DE-F190-5444-87AC-4719D5F20D15}" type="datetimeFigureOut">
               <a:rPr lang="en-US" smtClean="0"/>
-              <a:t>6/10/26</a:t>
+              <a:t>6/13/26</a:t>
             </a:fld>
             <a:endParaRPr lang="en-US"/>
           </a:p>
@@ -1149,7 +1149,7 @@
           <a:p>
             <a:fld id="{E759A0DE-F190-5444-87AC-4719D5F20D15}" type="datetimeFigureOut">
               <a:rPr lang="en-US" smtClean="0"/>
-              <a:t>6/10/26</a:t>
+              <a:t>6/13/26</a:t>
             </a:fld>
             <a:endParaRPr lang="en-US"/>
           </a:p>
@@ -1414,7 +1414,7 @@
           <a:p>
             <a:fld id="{E759A0DE-F190-5444-87AC-4719D5F20D15}" type="datetimeFigureOut">
               <a:rPr lang="en-US" smtClean="0"/>
-              <a:t>6/10/26</a:t>
+              <a:t>6/13/26</a:t>
             </a:fld>
             <a:endParaRPr lang="en-US"/>
           </a:p>
@@ -1826,7 +1826,7 @@
           <a:p>
             <a:fld id="{E759A0DE-F190-5444-87AC-4719D5F20D15}" type="datetimeFigureOut">
               <a:rPr lang="en-US" smtClean="0"/>
-              <a:t>6/10/26</a:t>
+              <a:t>6/13/26</a:t>
             </a:fld>
             <a:endParaRPr lang="en-US"/>
           </a:p>
@@ -1967,7 +1967,7 @@
           <a:p>
             <a:fld id="{E759A0DE-F190-5444-87AC-4719D5F20D15}" type="datetimeFigureOut">
               <a:rPr lang="en-US" smtClean="0"/>
-              <a:t>6/10/26</a:t>
+              <a:t>6/13/26</a:t>
             </a:fld>
             <a:endParaRPr lang="en-US"/>
           </a:p>
@@ -2080,7 +2080,7 @@
           <a:p>
             <a:fld id="{E759A0DE-F190-5444-87AC-4719D5F20D15}" type="datetimeFigureOut">
               <a:rPr lang="en-US" smtClean="0"/>
-              <a:t>6/10/26</a:t>
+              <a:t>6/13/26</a:t>
             </a:fld>
             <a:endParaRPr lang="en-US"/>
           </a:p>
@@ -2391,7 +2391,7 @@
           <a:p>
             <a:fld id="{E759A0DE-F190-5444-87AC-4719D5F20D15}" type="datetimeFigureOut">
               <a:rPr lang="en-US" smtClean="0"/>
-              <a:t>6/10/26</a:t>
+              <a:t>6/13/26</a:t>
             </a:fld>
             <a:endParaRPr lang="en-US"/>
           </a:p>
@@ -2679,7 +2679,7 @@
           <a:p>
             <a:fld id="{E759A0DE-F190-5444-87AC-4719D5F20D15}" type="datetimeFigureOut">
               <a:rPr lang="en-US" smtClean="0"/>
-              <a:t>6/10/26</a:t>
+              <a:t>6/13/26</a:t>
             </a:fld>
             <a:endParaRPr lang="en-US"/>
           </a:p>
@@ -2920,7 +2920,7 @@
           <a:p>
             <a:fld id="{E759A0DE-F190-5444-87AC-4719D5F20D15}" type="datetimeFigureOut">
               <a:rPr lang="en-US" smtClean="0"/>
-              <a:t>6/10/26</a:t>
+              <a:t>6/13/26</a:t>
             </a:fld>
             <a:endParaRPr lang="en-US"/>
           </a:p>
@@ -4066,7 +4066,7 @@
                 <a:latin typeface="Avenir Medium" panose="02000503020000020003" pitchFamily="2" charset="0"/>
                 <a:ea typeface="Bodoni Ornaments" pitchFamily="2" charset="0"/>
               </a:rPr>
-              <a:t>                C       Csus4   C</a:t>
+              <a:t>                C       Csus4   C         </a:t>
             </a:r>
           </a:p>
           <a:p>
@@ -4197,7 +4197,7 @@
                 <a:latin typeface="Avenir Medium" panose="02000503020000020003" pitchFamily="2" charset="0"/>
                 <a:ea typeface="Bodoni Ornaments" pitchFamily="2" charset="0"/>
               </a:rPr>
-              <a:t>Dm      G</a:t>
+              <a:t>                         Dm      G</a:t>
             </a:r>
           </a:p>
           <a:p>

--- a/Holy Forever-CH.pptx
+++ b/Holy Forever-CH.pptx
@@ -4277,10 +4277,10 @@
       </p:sp>
       <p:sp>
         <p:nvSpPr>
-          <p:cNvPr id="2" name="TextBox 1">
-            <a:extLst>
-              <a:ext uri="{FF2B5EF4-FFF2-40B4-BE49-F238E27FC236}">
-                <a16:creationId xmlns:a16="http://schemas.microsoft.com/office/drawing/2014/main" id="{60DEE651-6844-9EC6-A0D9-602381185E21}"/>
+          <p:cNvPr id="4" name="TextBox 3">
+            <a:extLst>
+              <a:ext uri="{FF2B5EF4-FFF2-40B4-BE49-F238E27FC236}">
+                <a16:creationId xmlns:a16="http://schemas.microsoft.com/office/drawing/2014/main" id="{794A101A-3762-DDDA-D38F-78AA34AB84EF}"/>
               </a:ext>
             </a:extLst>
           </p:cNvPr>
@@ -4289,8 +4289,8 @@
         </p:nvSpPr>
         <p:spPr>
           <a:xfrm>
-            <a:off x="8502316" y="673767"/>
-            <a:ext cx="2951748" cy="707886"/>
+            <a:off x="11005665" y="6273225"/>
+            <a:ext cx="1007007" cy="584775"/>
           </a:xfrm>
           <a:prstGeom prst="rect">
             <a:avLst/>
@@ -4298,22 +4298,19 @@
           <a:noFill/>
         </p:spPr>
         <p:txBody>
-          <a:bodyPr wrap="square" rtlCol="0">
+          <a:bodyPr wrap="none" rtlCol="0">
             <a:spAutoFit/>
           </a:bodyPr>
           <a:lstStyle/>
           <a:p>
             <a:r>
-              <a:rPr lang="en-US" sz="4000">
-                <a:solidFill>
-                  <a:schemeClr val="bg1"/>
-                </a:solidFill>
-                <a:latin typeface="Avenir Medium" panose="02000503020000020003" pitchFamily="2" charset="0"/>
-                <a:ea typeface="Bodoni Ornaments" pitchFamily="2" charset="0"/>
+              <a:rPr lang="en-US" sz="3200" b="1" dirty="0">
+                <a:solidFill>
+                  <a:srgbClr val="FF0000"/>
+                </a:solidFill>
               </a:rPr>
               <a:t>END</a:t>
             </a:r>
-            <a:endParaRPr lang="en-US" sz="4000" dirty="0"/>
           </a:p>
         </p:txBody>
       </p:sp>
